--- a/6.CICD/2.CICD gitlab/Les environements.pptx
+++ b/6.CICD/2.CICD gitlab/Les environements.pptx
@@ -219,7 +219,7 @@
           <a:p>
             <a:fld id="{D2B9BB29-2F69-4BAD-BAE6-35EBE787D585}" type="datetimeFigureOut">
               <a:rPr lang="fr-FR" smtClean="0"/>
-              <a:t>06/06/2025</a:t>
+              <a:t>01/03/2026</a:t>
             </a:fld>
             <a:endParaRPr lang="fr-FR"/>
           </a:p>
@@ -630,7 +630,7 @@
           <a:p>
             <a:fld id="{BD18AD39-8054-4B4E-A8CA-E68688617542}" type="datetimeFigureOut">
               <a:rPr lang="fr-FR" smtClean="0"/>
-              <a:t>06/06/2025</a:t>
+              <a:t>01/03/2026</a:t>
             </a:fld>
             <a:endParaRPr lang="fr-FR"/>
           </a:p>
@@ -838,7 +838,7 @@
           <a:p>
             <a:fld id="{BD18AD39-8054-4B4E-A8CA-E68688617542}" type="datetimeFigureOut">
               <a:rPr lang="fr-FR" smtClean="0"/>
-              <a:t>06/06/2025</a:t>
+              <a:t>01/03/2026</a:t>
             </a:fld>
             <a:endParaRPr lang="fr-FR"/>
           </a:p>
@@ -1046,7 +1046,7 @@
           <a:p>
             <a:fld id="{BD18AD39-8054-4B4E-A8CA-E68688617542}" type="datetimeFigureOut">
               <a:rPr lang="fr-FR" smtClean="0"/>
-              <a:t>06/06/2025</a:t>
+              <a:t>01/03/2026</a:t>
             </a:fld>
             <a:endParaRPr lang="fr-FR"/>
           </a:p>
@@ -1254,7 +1254,7 @@
           <a:p>
             <a:fld id="{BD18AD39-8054-4B4E-A8CA-E68688617542}" type="datetimeFigureOut">
               <a:rPr lang="fr-FR" smtClean="0"/>
-              <a:t>06/06/2025</a:t>
+              <a:t>01/03/2026</a:t>
             </a:fld>
             <a:endParaRPr lang="fr-FR"/>
           </a:p>
@@ -1536,7 +1536,7 @@
           <a:p>
             <a:fld id="{BD18AD39-8054-4B4E-A8CA-E68688617542}" type="datetimeFigureOut">
               <a:rPr lang="fr-FR" smtClean="0"/>
-              <a:t>06/06/2025</a:t>
+              <a:t>01/03/2026</a:t>
             </a:fld>
             <a:endParaRPr lang="fr-FR"/>
           </a:p>
@@ -1803,7 +1803,7 @@
           <a:p>
             <a:fld id="{BD18AD39-8054-4B4E-A8CA-E68688617542}" type="datetimeFigureOut">
               <a:rPr lang="fr-FR" smtClean="0"/>
-              <a:t>06/06/2025</a:t>
+              <a:t>01/03/2026</a:t>
             </a:fld>
             <a:endParaRPr lang="fr-FR"/>
           </a:p>
@@ -2206,7 +2206,7 @@
           <a:p>
             <a:fld id="{BD18AD39-8054-4B4E-A8CA-E68688617542}" type="datetimeFigureOut">
               <a:rPr lang="fr-FR" smtClean="0"/>
-              <a:t>06/06/2025</a:t>
+              <a:t>01/03/2026</a:t>
             </a:fld>
             <a:endParaRPr lang="fr-FR"/>
           </a:p>
@@ -2355,7 +2355,7 @@
           <a:p>
             <a:fld id="{BD18AD39-8054-4B4E-A8CA-E68688617542}" type="datetimeFigureOut">
               <a:rPr lang="fr-FR" smtClean="0"/>
-              <a:t>06/06/2025</a:t>
+              <a:t>01/03/2026</a:t>
             </a:fld>
             <a:endParaRPr lang="fr-FR"/>
           </a:p>
@@ -2474,7 +2474,7 @@
           <a:p>
             <a:fld id="{BD18AD39-8054-4B4E-A8CA-E68688617542}" type="datetimeFigureOut">
               <a:rPr lang="fr-FR" smtClean="0"/>
-              <a:t>06/06/2025</a:t>
+              <a:t>01/03/2026</a:t>
             </a:fld>
             <a:endParaRPr lang="fr-FR"/>
           </a:p>
@@ -2782,7 +2782,7 @@
           <a:p>
             <a:fld id="{BD18AD39-8054-4B4E-A8CA-E68688617542}" type="datetimeFigureOut">
               <a:rPr lang="fr-FR" smtClean="0"/>
-              <a:t>06/06/2025</a:t>
+              <a:t>01/03/2026</a:t>
             </a:fld>
             <a:endParaRPr lang="fr-FR"/>
           </a:p>
@@ -3067,7 +3067,7 @@
           <a:p>
             <a:fld id="{BD18AD39-8054-4B4E-A8CA-E68688617542}" type="datetimeFigureOut">
               <a:rPr lang="fr-FR" smtClean="0"/>
-              <a:t>06/06/2025</a:t>
+              <a:t>01/03/2026</a:t>
             </a:fld>
             <a:endParaRPr lang="fr-FR"/>
           </a:p>
@@ -3546,23 +3546,8 @@
                 </a:solidFill>
                 <a:latin typeface="Comic Sans MS" pitchFamily="66" charset="0"/>
               </a:rPr>
-              <a:t>Les </a:t>
-            </a:r>
-            <a:r>
-              <a:rPr lang="fr-FR" sz="2800" dirty="0" smtClean="0">
-                <a:solidFill>
-                  <a:srgbClr val="1C3158"/>
-                </a:solidFill>
-                <a:latin typeface="Comic Sans MS" pitchFamily="66" charset="0"/>
-              </a:rPr>
-              <a:t>environnements</a:t>
-            </a:r>
-            <a:endParaRPr lang="fr-FR" sz="2800" dirty="0" smtClean="0">
-              <a:solidFill>
-                <a:srgbClr val="1C3158"/>
-              </a:solidFill>
-              <a:latin typeface="Comic Sans MS" pitchFamily="66" charset="0"/>
-            </a:endParaRPr>
+              <a:t>Les environnements</a:t>
+            </a:r>
           </a:p>
           <a:p>
             <a:pPr algn="ctr"/>
@@ -3844,15 +3829,7 @@
                   <a:schemeClr val="bg1"/>
                 </a:solidFill>
               </a:rPr>
-              <a:t>Les </a:t>
-            </a:r>
-            <a:r>
-              <a:rPr lang="fr-FR" sz="3200" b="1" i="1" dirty="0" smtClean="0">
-                <a:solidFill>
-                  <a:schemeClr val="bg1"/>
-                </a:solidFill>
-              </a:rPr>
-              <a:t>environnements</a:t>
+              <a:t>Les environnements</a:t>
             </a:r>
             <a:endParaRPr lang="fr-FR" sz="3200" b="1" i="1" dirty="0">
               <a:solidFill>
@@ -5351,15 +5328,7 @@
                   <a:schemeClr val="bg1"/>
                 </a:solidFill>
               </a:rPr>
-              <a:t>Les </a:t>
-            </a:r>
-            <a:r>
-              <a:rPr lang="fr-FR" sz="3200" b="1" i="1" dirty="0" smtClean="0">
-                <a:solidFill>
-                  <a:schemeClr val="bg1"/>
-                </a:solidFill>
-              </a:rPr>
-              <a:t>environnements</a:t>
+              <a:t>Les environnements</a:t>
             </a:r>
             <a:endParaRPr lang="fr-FR" sz="3200" b="1" i="1" dirty="0">
               <a:solidFill>
@@ -6330,15 +6299,7 @@
                   <a:schemeClr val="bg1"/>
                 </a:solidFill>
               </a:rPr>
-              <a:t>Les </a:t>
-            </a:r>
-            <a:r>
-              <a:rPr lang="fr-FR" sz="3200" b="1" i="1" dirty="0" smtClean="0">
-                <a:solidFill>
-                  <a:schemeClr val="bg1"/>
-                </a:solidFill>
-              </a:rPr>
-              <a:t>variables d’environnements</a:t>
+              <a:t>Les variables d’environnements</a:t>
             </a:r>
             <a:endParaRPr lang="fr-FR" sz="3200" b="1" i="1" dirty="0">
               <a:solidFill>
@@ -7276,15 +7237,7 @@
                   <a:schemeClr val="bg1"/>
                 </a:solidFill>
               </a:rPr>
-              <a:t>Les </a:t>
-            </a:r>
-            <a:r>
-              <a:rPr lang="fr-FR" sz="3200" b="1" i="1" dirty="0" smtClean="0">
-                <a:solidFill>
-                  <a:schemeClr val="bg1"/>
-                </a:solidFill>
-              </a:rPr>
-              <a:t>variables d’environnements</a:t>
+              <a:t>Les variables d’environnements</a:t>
             </a:r>
             <a:endParaRPr lang="fr-FR" sz="3200" b="1" i="1" dirty="0">
               <a:solidFill>
@@ -8222,15 +8175,7 @@
                   <a:schemeClr val="bg1"/>
                 </a:solidFill>
               </a:rPr>
-              <a:t>Les </a:t>
-            </a:r>
-            <a:r>
-              <a:rPr lang="fr-FR" sz="3200" b="1" i="1" dirty="0" smtClean="0">
-                <a:solidFill>
-                  <a:schemeClr val="bg1"/>
-                </a:solidFill>
-              </a:rPr>
-              <a:t>environnements temporaires</a:t>
+              <a:t>Les environnements temporaires</a:t>
             </a:r>
             <a:endParaRPr lang="fr-FR" sz="3200" b="1" i="1" dirty="0">
               <a:solidFill>
@@ -8242,14 +8187,14 @@
       </p:sp>
       <p:sp>
         <p:nvSpPr>
-          <p:cNvPr id="11" name="Rectangle 10"/>
+          <p:cNvPr id="4" name="Rectangle 3"/>
           <p:cNvSpPr/>
           <p:nvPr/>
         </p:nvSpPr>
         <p:spPr>
           <a:xfrm>
-            <a:off x="245191" y="743359"/>
-            <a:ext cx="5052537" cy="369332"/>
+            <a:off x="318500" y="937140"/>
+            <a:ext cx="3231975" cy="369332"/>
           </a:xfrm>
           <a:prstGeom prst="rect">
             <a:avLst/>
@@ -8262,718 +8207,90 @@
           <a:lstStyle/>
           <a:p>
             <a:r>
-              <a:rPr lang="fr-FR" dirty="0"/>
-              <a:t>Pourquoi utiliser des environnements temporaires ?</a:t>
-            </a:r>
-            <a:endParaRPr lang="en-US" dirty="0"/>
+              <a:rPr lang="fr-FR" b="1" dirty="0"/>
+              <a:t>À quoi ça sert dans la vraie vie ?</a:t>
+            </a:r>
+            <a:endParaRPr lang="en-US" b="1" dirty="0"/>
           </a:p>
         </p:txBody>
       </p:sp>
       <p:sp>
         <p:nvSpPr>
-          <p:cNvPr id="12" name="Rectangle 1"/>
-          <p:cNvSpPr>
-            <a:spLocks noChangeArrowheads="1"/>
-          </p:cNvSpPr>
+          <p:cNvPr id="5" name="Rectangle 4"/>
+          <p:cNvSpPr/>
           <p:nvPr/>
         </p:nvSpPr>
-        <p:spPr bwMode="auto">
+        <p:spPr>
           <a:xfrm>
-            <a:off x="623731" y="1224814"/>
-            <a:ext cx="6200964" cy="2585323"/>
+            <a:off x="318500" y="1412599"/>
+            <a:ext cx="6096000" cy="1477328"/>
           </a:xfrm>
           <a:prstGeom prst="rect">
             <a:avLst/>
           </a:prstGeom>
-          <a:noFill/>
-          <a:ln>
-            <a:noFill/>
-          </a:ln>
-          <a:effectLst/>
-          <a:extLst>
-            <a:ext uri="{909E8E84-426E-40DD-AFC4-6F175D3DCCD1}">
-              <a14:hiddenFill xmlns:a14="http://schemas.microsoft.com/office/drawing/2010/main">
-                <a:solidFill>
-                  <a:schemeClr val="accent1"/>
-                </a:solidFill>
-              </a14:hiddenFill>
-            </a:ext>
-            <a:ext uri="{91240B29-F687-4F45-9708-019B960494DF}">
-              <a14:hiddenLine xmlns:a14="http://schemas.microsoft.com/office/drawing/2010/main" w="9525">
-                <a:solidFill>
-                  <a:schemeClr val="tx1"/>
-                </a:solidFill>
-                <a:miter lim="800000"/>
-                <a:headEnd/>
-                <a:tailEnd/>
-              </a14:hiddenLine>
-            </a:ext>
-            <a:ext uri="{AF507438-7753-43E0-B8FC-AC1667EBCBE1}">
-              <a14:hiddenEffects xmlns:a14="http://schemas.microsoft.com/office/drawing/2010/main">
-                <a:effectLst>
-                  <a:outerShdw dist="35921" dir="2700000" algn="ctr" rotWithShape="0">
-                    <a:schemeClr val="bg2"/>
-                  </a:outerShdw>
-                </a:effectLst>
-              </a14:hiddenEffects>
-            </a:ext>
-          </a:extLst>
         </p:spPr>
         <p:txBody>
-          <a:bodyPr vert="horz" wrap="square" lIns="91440" tIns="45720" rIns="91440" bIns="45720" numCol="1" anchor="ctr" anchorCtr="0" compatLnSpc="1">
-            <a:prstTxWarp prst="textNoShape">
-              <a:avLst/>
-            </a:prstTxWarp>
+          <a:bodyPr>
             <a:spAutoFit/>
           </a:bodyPr>
           <a:lstStyle/>
           <a:p>
-            <a:pPr marL="0" marR="0" lvl="0" indent="0" algn="l" defTabSz="914400" rtl="0" eaLnBrk="0" fontAlgn="base" latinLnBrk="0" hangingPunct="0">
-              <a:lnSpc>
-                <a:spcPct val="100000"/>
-              </a:lnSpc>
-              <a:spcBef>
-                <a:spcPct val="0"/>
-              </a:spcBef>
-              <a:spcAft>
-                <a:spcPct val="0"/>
-              </a:spcAft>
-              <a:buClrTx/>
-              <a:buSzTx/>
-              <a:buFontTx/>
-              <a:buChar char="•"/>
-              <a:tabLst/>
+            <a:r>
+              <a:rPr lang="fr-FR" dirty="0"/>
+              <a:t>Cas réel :</a:t>
+            </a:r>
+          </a:p>
+          <a:p>
+            <a:pPr lvl="1">
+              <a:buFont typeface="+mj-lt"/>
+              <a:buAutoNum type="arabicPeriod"/>
             </a:pPr>
             <a:r>
-              <a:rPr kumimoji="0" lang="en-US" altLang="en-US" b="0" i="0" u="none" strike="noStrike" cap="none" normalizeH="0" baseline="0" dirty="0" smtClean="0">
-                <a:ln>
-                  <a:noFill/>
-                </a:ln>
-                <a:solidFill>
-                  <a:schemeClr val="tx1"/>
-                </a:solidFill>
-                <a:effectLst/>
-                <a:latin typeface="Arial" panose="020B0604020202020204" pitchFamily="34" charset="0"/>
-              </a:rPr>
-              <a:t>Tester les </a:t>
-            </a:r>
-            <a:r>
-              <a:rPr kumimoji="0" lang="en-US" altLang="en-US" b="0" i="0" u="none" strike="noStrike" cap="none" normalizeH="0" baseline="0" dirty="0" err="1" smtClean="0">
-                <a:ln>
-                  <a:noFill/>
-                </a:ln>
-                <a:solidFill>
-                  <a:schemeClr val="tx1"/>
-                </a:solidFill>
-                <a:effectLst/>
-                <a:latin typeface="Arial" panose="020B0604020202020204" pitchFamily="34" charset="0"/>
-              </a:rPr>
-              <a:t>changements</a:t>
-            </a:r>
-            <a:r>
-              <a:rPr kumimoji="0" lang="en-US" altLang="en-US" b="0" i="0" u="none" strike="noStrike" cap="none" normalizeH="0" baseline="0" dirty="0" smtClean="0">
-                <a:ln>
-                  <a:noFill/>
-                </a:ln>
-                <a:solidFill>
-                  <a:schemeClr val="tx1"/>
-                </a:solidFill>
-                <a:effectLst/>
-                <a:latin typeface="Arial" panose="020B0604020202020204" pitchFamily="34" charset="0"/>
-              </a:rPr>
-              <a:t> </a:t>
-            </a:r>
-            <a:r>
-              <a:rPr kumimoji="0" lang="en-US" altLang="en-US" b="1" i="0" u="none" strike="noStrike" cap="none" normalizeH="0" baseline="0" dirty="0" err="1" smtClean="0">
-                <a:ln>
-                  <a:noFill/>
-                </a:ln>
-                <a:solidFill>
-                  <a:schemeClr val="tx1"/>
-                </a:solidFill>
-                <a:effectLst/>
-                <a:latin typeface="Arial" panose="020B0604020202020204" pitchFamily="34" charset="0"/>
-              </a:rPr>
-              <a:t>en</a:t>
-            </a:r>
-            <a:r>
-              <a:rPr kumimoji="0" lang="en-US" altLang="en-US" b="1" i="0" u="none" strike="noStrike" cap="none" normalizeH="0" baseline="0" dirty="0" smtClean="0">
-                <a:ln>
-                  <a:noFill/>
-                </a:ln>
-                <a:solidFill>
-                  <a:schemeClr val="tx1"/>
-                </a:solidFill>
-                <a:effectLst/>
-                <a:latin typeface="Arial" panose="020B0604020202020204" pitchFamily="34" charset="0"/>
-              </a:rPr>
-              <a:t> conditions </a:t>
-            </a:r>
-            <a:r>
-              <a:rPr kumimoji="0" lang="en-US" altLang="en-US" b="1" i="0" u="none" strike="noStrike" cap="none" normalizeH="0" baseline="0" dirty="0" err="1" smtClean="0">
-                <a:ln>
-                  <a:noFill/>
-                </a:ln>
-                <a:solidFill>
-                  <a:schemeClr val="tx1"/>
-                </a:solidFill>
-                <a:effectLst/>
-                <a:latin typeface="Arial" panose="020B0604020202020204" pitchFamily="34" charset="0"/>
-              </a:rPr>
-              <a:t>réelles</a:t>
-            </a:r>
-            <a:endParaRPr kumimoji="0" lang="en-US" altLang="en-US" b="1" i="0" u="none" strike="noStrike" cap="none" normalizeH="0" baseline="0" dirty="0" smtClean="0">
-              <a:ln>
-                <a:noFill/>
-              </a:ln>
-              <a:solidFill>
-                <a:schemeClr val="tx1"/>
-              </a:solidFill>
-              <a:effectLst/>
-              <a:latin typeface="Arial" panose="020B0604020202020204" pitchFamily="34" charset="0"/>
-            </a:endParaRPr>
-          </a:p>
-          <a:p>
-            <a:pPr marL="0" marR="0" lvl="0" indent="0" algn="l" defTabSz="914400" rtl="0" eaLnBrk="0" fontAlgn="base" latinLnBrk="0" hangingPunct="0">
-              <a:lnSpc>
-                <a:spcPct val="100000"/>
-              </a:lnSpc>
-              <a:spcBef>
-                <a:spcPct val="0"/>
-              </a:spcBef>
-              <a:spcAft>
-                <a:spcPct val="0"/>
-              </a:spcAft>
-              <a:buClrTx/>
-              <a:buSzTx/>
-              <a:buFontTx/>
-              <a:buChar char="•"/>
-              <a:tabLst/>
+              <a:rPr lang="fr-FR" dirty="0"/>
+              <a:t>Un développeur crée </a:t>
+            </a:r>
+            <a:r>
+              <a:rPr lang="fr-FR" dirty="0" err="1"/>
+              <a:t>feature</a:t>
+            </a:r>
+            <a:r>
+              <a:rPr lang="fr-FR" dirty="0"/>
+              <a:t>-login</a:t>
+            </a:r>
+          </a:p>
+          <a:p>
+            <a:pPr lvl="1">
+              <a:buFont typeface="+mj-lt"/>
+              <a:buAutoNum type="arabicPeriod"/>
             </a:pPr>
-            <a:endParaRPr kumimoji="0" lang="en-US" altLang="en-US" b="0" i="0" u="none" strike="noStrike" cap="none" normalizeH="0" baseline="0" dirty="0" smtClean="0">
-              <a:ln>
-                <a:noFill/>
-              </a:ln>
-              <a:solidFill>
-                <a:schemeClr val="tx1"/>
-              </a:solidFill>
-              <a:effectLst/>
-              <a:latin typeface="Arial" panose="020B0604020202020204" pitchFamily="34" charset="0"/>
-            </a:endParaRPr>
-          </a:p>
-          <a:p>
-            <a:pPr marL="0" marR="0" lvl="0" indent="0" algn="l" defTabSz="914400" rtl="0" eaLnBrk="0" fontAlgn="base" latinLnBrk="0" hangingPunct="0">
-              <a:lnSpc>
-                <a:spcPct val="100000"/>
-              </a:lnSpc>
-              <a:spcBef>
-                <a:spcPct val="0"/>
-              </a:spcBef>
-              <a:spcAft>
-                <a:spcPct val="0"/>
-              </a:spcAft>
-              <a:buClrTx/>
-              <a:buSzTx/>
-              <a:buFontTx/>
-              <a:buChar char="•"/>
-              <a:tabLst/>
+            <a:r>
+              <a:rPr lang="fr-FR" dirty="0" err="1"/>
+              <a:t>GitLab</a:t>
+            </a:r>
+            <a:r>
+              <a:rPr lang="fr-FR" dirty="0"/>
+              <a:t> déploie une version isolée</a:t>
+            </a:r>
+          </a:p>
+          <a:p>
+            <a:pPr lvl="1">
+              <a:buFont typeface="+mj-lt"/>
+              <a:buAutoNum type="arabicPeriod"/>
             </a:pPr>
             <a:r>
-              <a:rPr kumimoji="0" lang="en-US" altLang="en-US" b="0" i="0" u="none" strike="noStrike" cap="none" normalizeH="0" baseline="0" dirty="0" err="1" smtClean="0">
-                <a:ln>
-                  <a:noFill/>
-                </a:ln>
-                <a:solidFill>
-                  <a:schemeClr val="tx1"/>
-                </a:solidFill>
-                <a:effectLst/>
-                <a:latin typeface="Arial" panose="020B0604020202020204" pitchFamily="34" charset="0"/>
-              </a:rPr>
-              <a:t>Obtenir</a:t>
-            </a:r>
-            <a:r>
-              <a:rPr kumimoji="0" lang="en-US" altLang="en-US" b="0" i="0" u="none" strike="noStrike" cap="none" normalizeH="0" baseline="0" dirty="0" smtClean="0">
-                <a:ln>
-                  <a:noFill/>
-                </a:ln>
-                <a:solidFill>
-                  <a:schemeClr val="tx1"/>
-                </a:solidFill>
-                <a:effectLst/>
-                <a:latin typeface="Arial" panose="020B0604020202020204" pitchFamily="34" charset="0"/>
-              </a:rPr>
-              <a:t> des retours </a:t>
-            </a:r>
-            <a:r>
-              <a:rPr kumimoji="0" lang="en-US" altLang="en-US" b="0" i="0" u="none" strike="noStrike" cap="none" normalizeH="0" baseline="0" dirty="0" err="1" smtClean="0">
-                <a:ln>
-                  <a:noFill/>
-                </a:ln>
-                <a:solidFill>
-                  <a:schemeClr val="tx1"/>
-                </a:solidFill>
-                <a:effectLst/>
-                <a:latin typeface="Arial" panose="020B0604020202020204" pitchFamily="34" charset="0"/>
-              </a:rPr>
-              <a:t>rapides</a:t>
-            </a:r>
-            <a:r>
-              <a:rPr kumimoji="0" lang="en-US" altLang="en-US" b="0" i="0" u="none" strike="noStrike" cap="none" normalizeH="0" baseline="0" dirty="0" smtClean="0">
-                <a:ln>
-                  <a:noFill/>
-                </a:ln>
-                <a:solidFill>
-                  <a:schemeClr val="tx1"/>
-                </a:solidFill>
-                <a:effectLst/>
-                <a:latin typeface="Arial" panose="020B0604020202020204" pitchFamily="34" charset="0"/>
-              </a:rPr>
-              <a:t> des </a:t>
-            </a:r>
-            <a:r>
-              <a:rPr kumimoji="0" lang="en-US" altLang="en-US" b="0" i="0" u="none" strike="noStrike" cap="none" normalizeH="0" baseline="0" dirty="0" err="1" smtClean="0">
-                <a:ln>
-                  <a:noFill/>
-                </a:ln>
-                <a:solidFill>
-                  <a:schemeClr val="tx1"/>
-                </a:solidFill>
-                <a:effectLst/>
-                <a:latin typeface="Arial" panose="020B0604020202020204" pitchFamily="34" charset="0"/>
-              </a:rPr>
-              <a:t>équipes</a:t>
-            </a:r>
-            <a:r>
-              <a:rPr kumimoji="0" lang="en-US" altLang="en-US" b="0" i="0" u="none" strike="noStrike" cap="none" normalizeH="0" baseline="0" dirty="0" smtClean="0">
-                <a:ln>
-                  <a:noFill/>
-                </a:ln>
-                <a:solidFill>
-                  <a:schemeClr val="tx1"/>
-                </a:solidFill>
-                <a:effectLst/>
-                <a:latin typeface="Arial" panose="020B0604020202020204" pitchFamily="34" charset="0"/>
-              </a:rPr>
-              <a:t> QA / PO</a:t>
-            </a:r>
-          </a:p>
-          <a:p>
-            <a:pPr marL="0" marR="0" lvl="0" indent="0" algn="l" defTabSz="914400" rtl="0" eaLnBrk="0" fontAlgn="base" latinLnBrk="0" hangingPunct="0">
-              <a:lnSpc>
-                <a:spcPct val="100000"/>
-              </a:lnSpc>
-              <a:spcBef>
-                <a:spcPct val="0"/>
-              </a:spcBef>
-              <a:spcAft>
-                <a:spcPct val="0"/>
-              </a:spcAft>
-              <a:buClrTx/>
-              <a:buSzTx/>
-              <a:buFontTx/>
-              <a:buChar char="•"/>
-              <a:tabLst/>
+              <a:rPr lang="fr-FR" dirty="0"/>
+              <a:t>Le testeur accède à l’URL spécifique</a:t>
+            </a:r>
+          </a:p>
+          <a:p>
+            <a:pPr lvl="1">
+              <a:buFont typeface="+mj-lt"/>
+              <a:buAutoNum type="arabicPeriod"/>
             </a:pPr>
-            <a:endParaRPr kumimoji="0" lang="en-US" altLang="en-US" b="0" i="0" u="none" strike="noStrike" cap="none" normalizeH="0" baseline="0" dirty="0" smtClean="0">
-              <a:ln>
-                <a:noFill/>
-              </a:ln>
-              <a:solidFill>
-                <a:schemeClr val="tx1"/>
-              </a:solidFill>
-              <a:effectLst/>
-              <a:latin typeface="Arial" panose="020B0604020202020204" pitchFamily="34" charset="0"/>
-            </a:endParaRPr>
-          </a:p>
-          <a:p>
-            <a:pPr marL="0" marR="0" lvl="0" indent="0" algn="l" defTabSz="914400" rtl="0" eaLnBrk="0" fontAlgn="base" latinLnBrk="0" hangingPunct="0">
-              <a:lnSpc>
-                <a:spcPct val="100000"/>
-              </a:lnSpc>
-              <a:spcBef>
-                <a:spcPct val="0"/>
-              </a:spcBef>
-              <a:spcAft>
-                <a:spcPct val="0"/>
-              </a:spcAft>
-              <a:buClrTx/>
-              <a:buSzTx/>
-              <a:buFontTx/>
-              <a:buChar char="•"/>
-              <a:tabLst/>
-            </a:pPr>
-            <a:r>
-              <a:rPr kumimoji="0" lang="en-US" altLang="en-US" b="0" i="0" u="none" strike="noStrike" cap="none" normalizeH="0" baseline="0" dirty="0" err="1" smtClean="0">
-                <a:ln>
-                  <a:noFill/>
-                </a:ln>
-                <a:solidFill>
-                  <a:schemeClr val="tx1"/>
-                </a:solidFill>
-                <a:effectLst/>
-                <a:latin typeface="Arial" panose="020B0604020202020204" pitchFamily="34" charset="0"/>
-              </a:rPr>
-              <a:t>Prévisualiser</a:t>
-            </a:r>
-            <a:r>
-              <a:rPr kumimoji="0" lang="en-US" altLang="en-US" b="0" i="0" u="none" strike="noStrike" cap="none" normalizeH="0" baseline="0" dirty="0" smtClean="0">
-                <a:ln>
-                  <a:noFill/>
-                </a:ln>
-                <a:solidFill>
-                  <a:schemeClr val="tx1"/>
-                </a:solidFill>
-                <a:effectLst/>
-                <a:latin typeface="Arial" panose="020B0604020202020204" pitchFamily="34" charset="0"/>
-              </a:rPr>
-              <a:t> </a:t>
-            </a:r>
-            <a:r>
-              <a:rPr kumimoji="0" lang="en-US" altLang="en-US" b="0" i="0" u="none" strike="noStrike" cap="none" normalizeH="0" baseline="0" dirty="0" err="1" smtClean="0">
-                <a:ln>
-                  <a:noFill/>
-                </a:ln>
-                <a:solidFill>
-                  <a:schemeClr val="tx1"/>
-                </a:solidFill>
-                <a:effectLst/>
-                <a:latin typeface="Arial" panose="020B0604020202020204" pitchFamily="34" charset="0"/>
-              </a:rPr>
-              <a:t>l’UI</a:t>
-            </a:r>
-            <a:r>
-              <a:rPr kumimoji="0" lang="en-US" altLang="en-US" b="0" i="0" u="none" strike="noStrike" cap="none" normalizeH="0" baseline="0" dirty="0" smtClean="0">
-                <a:ln>
-                  <a:noFill/>
-                </a:ln>
-                <a:solidFill>
-                  <a:schemeClr val="tx1"/>
-                </a:solidFill>
-                <a:effectLst/>
-                <a:latin typeface="Arial" panose="020B0604020202020204" pitchFamily="34" charset="0"/>
-              </a:rPr>
-              <a:t>/UX </a:t>
-            </a:r>
-            <a:r>
-              <a:rPr kumimoji="0" lang="en-US" altLang="en-US" b="0" i="0" u="none" strike="noStrike" cap="none" normalizeH="0" baseline="0" dirty="0" err="1" smtClean="0">
-                <a:ln>
-                  <a:noFill/>
-                </a:ln>
-                <a:solidFill>
-                  <a:schemeClr val="tx1"/>
-                </a:solidFill>
-                <a:effectLst/>
-                <a:latin typeface="Arial" panose="020B0604020202020204" pitchFamily="34" charset="0"/>
-              </a:rPr>
-              <a:t>avant</a:t>
-            </a:r>
-            <a:r>
-              <a:rPr kumimoji="0" lang="en-US" altLang="en-US" b="0" i="0" u="none" strike="noStrike" cap="none" normalizeH="0" baseline="0" dirty="0" smtClean="0">
-                <a:ln>
-                  <a:noFill/>
-                </a:ln>
-                <a:solidFill>
-                  <a:schemeClr val="tx1"/>
-                </a:solidFill>
-                <a:effectLst/>
-                <a:latin typeface="Arial" panose="020B0604020202020204" pitchFamily="34" charset="0"/>
-              </a:rPr>
-              <a:t> fusion</a:t>
-            </a:r>
-          </a:p>
-          <a:p>
-            <a:pPr marL="0" marR="0" lvl="0" indent="0" algn="l" defTabSz="914400" rtl="0" eaLnBrk="0" fontAlgn="base" latinLnBrk="0" hangingPunct="0">
-              <a:lnSpc>
-                <a:spcPct val="100000"/>
-              </a:lnSpc>
-              <a:spcBef>
-                <a:spcPct val="0"/>
-              </a:spcBef>
-              <a:spcAft>
-                <a:spcPct val="0"/>
-              </a:spcAft>
-              <a:buClrTx/>
-              <a:buSzTx/>
-              <a:buFontTx/>
-              <a:buChar char="•"/>
-              <a:tabLst/>
-            </a:pPr>
-            <a:endParaRPr kumimoji="0" lang="en-US" altLang="en-US" b="0" i="0" u="none" strike="noStrike" cap="none" normalizeH="0" baseline="0" dirty="0" smtClean="0">
-              <a:ln>
-                <a:noFill/>
-              </a:ln>
-              <a:solidFill>
-                <a:schemeClr val="tx1"/>
-              </a:solidFill>
-              <a:effectLst/>
-              <a:latin typeface="Arial" panose="020B0604020202020204" pitchFamily="34" charset="0"/>
-            </a:endParaRPr>
-          </a:p>
-          <a:p>
-            <a:pPr marL="0" marR="0" lvl="0" indent="0" algn="l" defTabSz="914400" rtl="0" eaLnBrk="0" fontAlgn="base" latinLnBrk="0" hangingPunct="0">
-              <a:lnSpc>
-                <a:spcPct val="100000"/>
-              </a:lnSpc>
-              <a:spcBef>
-                <a:spcPct val="0"/>
-              </a:spcBef>
-              <a:spcAft>
-                <a:spcPct val="0"/>
-              </a:spcAft>
-              <a:buClrTx/>
-              <a:buSzTx/>
-              <a:buFontTx/>
-              <a:buChar char="•"/>
-              <a:tabLst/>
-            </a:pPr>
-            <a:r>
-              <a:rPr kumimoji="0" lang="en-US" altLang="en-US" b="1" i="0" u="none" strike="noStrike" cap="none" normalizeH="0" baseline="0" dirty="0" err="1" smtClean="0">
-                <a:ln>
-                  <a:noFill/>
-                </a:ln>
-                <a:solidFill>
-                  <a:schemeClr val="tx1"/>
-                </a:solidFill>
-                <a:effectLst/>
-                <a:latin typeface="Arial" panose="020B0604020202020204" pitchFamily="34" charset="0"/>
-              </a:rPr>
-              <a:t>Isoler</a:t>
-            </a:r>
-            <a:r>
-              <a:rPr kumimoji="0" lang="en-US" altLang="en-US" b="0" i="0" u="none" strike="noStrike" cap="none" normalizeH="0" baseline="0" dirty="0" smtClean="0">
-                <a:ln>
-                  <a:noFill/>
-                </a:ln>
-                <a:solidFill>
-                  <a:schemeClr val="tx1"/>
-                </a:solidFill>
-                <a:effectLst/>
-                <a:latin typeface="Arial" panose="020B0604020202020204" pitchFamily="34" charset="0"/>
-              </a:rPr>
-              <a:t> les </a:t>
-            </a:r>
-            <a:r>
-              <a:rPr kumimoji="0" lang="en-US" altLang="en-US" b="0" i="0" u="none" strike="noStrike" cap="none" normalizeH="0" baseline="0" dirty="0" err="1" smtClean="0">
-                <a:ln>
-                  <a:noFill/>
-                </a:ln>
-                <a:solidFill>
-                  <a:schemeClr val="tx1"/>
-                </a:solidFill>
-                <a:effectLst/>
-                <a:latin typeface="Arial" panose="020B0604020202020204" pitchFamily="34" charset="0"/>
-              </a:rPr>
-              <a:t>développements</a:t>
-            </a:r>
-            <a:r>
-              <a:rPr kumimoji="0" lang="en-US" altLang="en-US" b="0" i="0" u="none" strike="noStrike" cap="none" normalizeH="0" baseline="0" dirty="0" smtClean="0">
-                <a:ln>
-                  <a:noFill/>
-                </a:ln>
-                <a:solidFill>
-                  <a:schemeClr val="tx1"/>
-                </a:solidFill>
-                <a:effectLst/>
-                <a:latin typeface="Arial" panose="020B0604020202020204" pitchFamily="34" charset="0"/>
-              </a:rPr>
-              <a:t> </a:t>
-            </a:r>
-            <a:r>
-              <a:rPr kumimoji="0" lang="en-US" altLang="en-US" b="0" i="0" u="none" strike="noStrike" cap="none" normalizeH="0" baseline="0" dirty="0" err="1" smtClean="0">
-                <a:ln>
-                  <a:noFill/>
-                </a:ln>
-                <a:solidFill>
-                  <a:schemeClr val="tx1"/>
-                </a:solidFill>
-                <a:effectLst/>
-                <a:latin typeface="Arial" panose="020B0604020202020204" pitchFamily="34" charset="0"/>
-              </a:rPr>
-              <a:t>en</a:t>
-            </a:r>
-            <a:r>
-              <a:rPr kumimoji="0" lang="en-US" altLang="en-US" b="0" i="0" u="none" strike="noStrike" cap="none" normalizeH="0" baseline="0" dirty="0" smtClean="0">
-                <a:ln>
-                  <a:noFill/>
-                </a:ln>
-                <a:solidFill>
-                  <a:schemeClr val="tx1"/>
-                </a:solidFill>
-                <a:effectLst/>
-                <a:latin typeface="Arial" panose="020B0604020202020204" pitchFamily="34" charset="0"/>
-              </a:rPr>
-              <a:t> </a:t>
-            </a:r>
-            <a:r>
-              <a:rPr kumimoji="0" lang="en-US" altLang="en-US" b="0" i="0" u="none" strike="noStrike" cap="none" normalizeH="0" baseline="0" dirty="0" err="1" smtClean="0">
-                <a:ln>
-                  <a:noFill/>
-                </a:ln>
-                <a:solidFill>
-                  <a:schemeClr val="tx1"/>
-                </a:solidFill>
-                <a:effectLst/>
-                <a:latin typeface="Arial" panose="020B0604020202020204" pitchFamily="34" charset="0"/>
-              </a:rPr>
-              <a:t>cours</a:t>
-            </a:r>
-            <a:endParaRPr kumimoji="0" lang="en-US" altLang="en-US" b="0" i="0" u="none" strike="noStrike" cap="none" normalizeH="0" baseline="0" dirty="0" smtClean="0">
-              <a:ln>
-                <a:noFill/>
-              </a:ln>
-              <a:solidFill>
-                <a:schemeClr val="tx1"/>
-              </a:solidFill>
-              <a:effectLst/>
-              <a:latin typeface="Arial" panose="020B0604020202020204" pitchFamily="34" charset="0"/>
-            </a:endParaRPr>
-          </a:p>
-          <a:p>
-            <a:pPr marL="0" marR="0" lvl="0" indent="0" algn="l" defTabSz="914400" rtl="0" eaLnBrk="0" fontAlgn="base" latinLnBrk="0" hangingPunct="0">
-              <a:lnSpc>
-                <a:spcPct val="100000"/>
-              </a:lnSpc>
-              <a:spcBef>
-                <a:spcPct val="0"/>
-              </a:spcBef>
-              <a:spcAft>
-                <a:spcPct val="0"/>
-              </a:spcAft>
-              <a:buClrTx/>
-              <a:buSzTx/>
-              <a:buFontTx/>
-              <a:buChar char="•"/>
-              <a:tabLst/>
-            </a:pPr>
-            <a:endParaRPr kumimoji="0" lang="en-US" altLang="en-US" b="0" i="0" u="none" strike="noStrike" cap="none" normalizeH="0" baseline="0" dirty="0" smtClean="0">
-              <a:ln>
-                <a:noFill/>
-              </a:ln>
-              <a:solidFill>
-                <a:schemeClr val="tx1"/>
-              </a:solidFill>
-              <a:effectLst/>
-              <a:latin typeface="Arial" panose="020B0604020202020204" pitchFamily="34" charset="0"/>
-            </a:endParaRPr>
-          </a:p>
-          <a:p>
-            <a:pPr marL="0" marR="0" lvl="0" indent="0" algn="l" defTabSz="914400" rtl="0" eaLnBrk="0" fontAlgn="base" latinLnBrk="0" hangingPunct="0">
-              <a:lnSpc>
-                <a:spcPct val="100000"/>
-              </a:lnSpc>
-              <a:spcBef>
-                <a:spcPct val="0"/>
-              </a:spcBef>
-              <a:spcAft>
-                <a:spcPct val="0"/>
-              </a:spcAft>
-              <a:buClrTx/>
-              <a:buSzTx/>
-              <a:buFontTx/>
-              <a:buChar char="•"/>
-              <a:tabLst/>
-            </a:pPr>
-            <a:r>
-              <a:rPr kumimoji="0" lang="en-US" altLang="en-US" b="0" i="0" u="none" strike="noStrike" cap="none" normalizeH="0" baseline="0" dirty="0" err="1" smtClean="0">
-                <a:ln>
-                  <a:noFill/>
-                </a:ln>
-                <a:solidFill>
-                  <a:schemeClr val="tx1"/>
-                </a:solidFill>
-                <a:effectLst/>
-                <a:latin typeface="Arial" panose="020B0604020202020204" pitchFamily="34" charset="0"/>
-              </a:rPr>
-              <a:t>Supprimer</a:t>
-            </a:r>
-            <a:r>
-              <a:rPr kumimoji="0" lang="en-US" altLang="en-US" b="0" i="0" u="none" strike="noStrike" cap="none" normalizeH="0" baseline="0" dirty="0" smtClean="0">
-                <a:ln>
-                  <a:noFill/>
-                </a:ln>
-                <a:solidFill>
-                  <a:schemeClr val="tx1"/>
-                </a:solidFill>
-                <a:effectLst/>
-                <a:latin typeface="Arial" panose="020B0604020202020204" pitchFamily="34" charset="0"/>
-              </a:rPr>
-              <a:t> </a:t>
-            </a:r>
-            <a:r>
-              <a:rPr kumimoji="0" lang="en-US" altLang="en-US" b="0" i="0" u="none" strike="noStrike" cap="none" normalizeH="0" baseline="0" dirty="0" err="1" smtClean="0">
-                <a:ln>
-                  <a:noFill/>
-                </a:ln>
-                <a:solidFill>
-                  <a:schemeClr val="tx1"/>
-                </a:solidFill>
-                <a:effectLst/>
-                <a:latin typeface="Arial" panose="020B0604020202020204" pitchFamily="34" charset="0"/>
-              </a:rPr>
-              <a:t>automatiquement</a:t>
-            </a:r>
-            <a:r>
-              <a:rPr kumimoji="0" lang="en-US" altLang="en-US" b="0" i="0" u="none" strike="noStrike" cap="none" normalizeH="0" baseline="0" dirty="0" smtClean="0">
-                <a:ln>
-                  <a:noFill/>
-                </a:ln>
-                <a:solidFill>
-                  <a:schemeClr val="tx1"/>
-                </a:solidFill>
-                <a:effectLst/>
-                <a:latin typeface="Arial" panose="020B0604020202020204" pitchFamily="34" charset="0"/>
-              </a:rPr>
-              <a:t> à la </a:t>
-            </a:r>
-            <a:r>
-              <a:rPr kumimoji="0" lang="en-US" altLang="en-US" b="0" i="0" u="none" strike="noStrike" cap="none" normalizeH="0" baseline="0" dirty="0" err="1" smtClean="0">
-                <a:ln>
-                  <a:noFill/>
-                </a:ln>
-                <a:solidFill>
-                  <a:schemeClr val="tx1"/>
-                </a:solidFill>
-                <a:effectLst/>
-                <a:latin typeface="Arial" panose="020B0604020202020204" pitchFamily="34" charset="0"/>
-              </a:rPr>
-              <a:t>fermeture</a:t>
-            </a:r>
-            <a:r>
-              <a:rPr kumimoji="0" lang="en-US" altLang="en-US" b="0" i="0" u="none" strike="noStrike" cap="none" normalizeH="0" baseline="0" dirty="0" smtClean="0">
-                <a:ln>
-                  <a:noFill/>
-                </a:ln>
-                <a:solidFill>
-                  <a:schemeClr val="tx1"/>
-                </a:solidFill>
-                <a:effectLst/>
-                <a:latin typeface="Arial" panose="020B0604020202020204" pitchFamily="34" charset="0"/>
-              </a:rPr>
-              <a:t> de la </a:t>
-            </a:r>
-            <a:r>
-              <a:rPr kumimoji="0" lang="en-US" altLang="en-US" b="0" i="0" u="none" strike="noStrike" cap="none" normalizeH="0" baseline="0" dirty="0" err="1" smtClean="0">
-                <a:ln>
-                  <a:noFill/>
-                </a:ln>
-                <a:solidFill>
-                  <a:schemeClr val="tx1"/>
-                </a:solidFill>
-                <a:effectLst/>
-                <a:latin typeface="Arial" panose="020B0604020202020204" pitchFamily="34" charset="0"/>
-              </a:rPr>
-              <a:t>branche</a:t>
-            </a:r>
-            <a:endParaRPr kumimoji="0" lang="en-US" altLang="en-US" b="0" i="0" u="none" strike="noStrike" cap="none" normalizeH="0" baseline="0" dirty="0" smtClean="0">
-              <a:ln>
-                <a:noFill/>
-              </a:ln>
-              <a:solidFill>
-                <a:schemeClr val="tx1"/>
-              </a:solidFill>
-              <a:effectLst/>
-              <a:latin typeface="Arial" panose="020B0604020202020204" pitchFamily="34" charset="0"/>
-            </a:endParaRPr>
+            <a:r>
+              <a:rPr lang="fr-FR" dirty="0"/>
+              <a:t>Une fois terminé → environnement supprimé</a:t>
+            </a:r>
           </a:p>
         </p:txBody>
       </p:sp>
@@ -9083,15 +8400,7 @@
                   <a:schemeClr val="bg1"/>
                 </a:solidFill>
               </a:rPr>
-              <a:t>Les </a:t>
-            </a:r>
-            <a:r>
-              <a:rPr lang="fr-FR" sz="3200" b="1" i="1" dirty="0" smtClean="0">
-                <a:solidFill>
-                  <a:schemeClr val="bg1"/>
-                </a:solidFill>
-              </a:rPr>
-              <a:t>environnements temporaires</a:t>
+              <a:t>Les environnements temporaires</a:t>
             </a:r>
             <a:endParaRPr lang="fr-FR" sz="3200" b="1" i="1" dirty="0">
               <a:solidFill>
@@ -9656,15 +8965,7 @@
                   <a:schemeClr val="bg1"/>
                 </a:solidFill>
               </a:rPr>
-              <a:t>Les </a:t>
-            </a:r>
-            <a:r>
-              <a:rPr lang="fr-FR" sz="3200" b="1" i="1" dirty="0" smtClean="0">
-                <a:solidFill>
-                  <a:schemeClr val="bg1"/>
-                </a:solidFill>
-              </a:rPr>
-              <a:t>environnements temporaires</a:t>
+              <a:t>Les environnements temporaires</a:t>
             </a:r>
             <a:endParaRPr lang="fr-FR" sz="3200" b="1" i="1" dirty="0">
               <a:solidFill>
